--- a/slides/decks/s13-sos-vod-endothelial.pptx
+++ b/slides/decks/s13-sos-vod-endothelial.pptx
@@ -132,13 +132,13 @@
   <p:extLst>
     <p:ext uri="{521415D9-36F7-43E2-AB2F-B90AF26B5E84}">
       <p14:sectionLst xmlns:p14="http://schemas.microsoft.com/office/powerpoint/2010/main">
-        <p14:section name="Opening" id="{e021cf0b-25a5-95c5-7ded-ff3201c0aebc}">
+        <p14:section name="Opening" id="{c63315ec-73fc-e920-5860-de87361df3d5}">
           <p14:sldIdLst>
             <p14:sldId id="256"/>
             <p14:sldId id="257"/>
           </p14:sldIdLst>
         </p14:section>
-        <p14:section name="SOS/VOD" id="{e70a0764-730a-76a9-3750-c3152378cd63}">
+        <p14:section name="SOS/VOD" id="{fc04d6e8-dd45-bcb1-2dab-5a1ed27dfc74}">
           <p14:sldIdLst>
             <p14:sldId id="258"/>
             <p14:sldId id="259"/>
@@ -149,20 +149,20 @@
             <p14:sldId id="264"/>
           </p14:sldIdLst>
         </p14:section>
-        <p14:section name="Endothelial syndromes" id="{e685ff4a-87d8-b3c7-5220-02e6d0ef7b8f}">
+        <p14:section name="Endothelial syndromes" id="{78b90bf9-3bb0-54f8-44cb-89a05b406da3}">
           <p14:sldIdLst>
             <p14:sldId id="265"/>
             <p14:sldId id="266"/>
           </p14:sldIdLst>
         </p14:section>
-        <p14:section name="TA-TMA and PRES" id="{c2218d83-c8ec-67b9-3c52-41f55214ab65}">
+        <p14:section name="TA-TMA and PRES" id="{31c4f476-8ecd-0776-027f-444319e92fea}">
           <p14:sldIdLst>
             <p14:sldId id="267"/>
             <p14:sldId id="268"/>
             <p14:sldId id="269"/>
           </p14:sldIdLst>
         </p14:section>
-        <p14:section name="Board questions" id="{db016a52-cccd-286d-4b77-376c3376a79f}">
+        <p14:section name="Board questions" id="{64090f2c-3b34-d7c9-7edd-5f4739f6f77e}">
           <p14:sldIdLst>
             <p14:sldId id="270"/>
             <p14:sldId id="271"/>
@@ -172,13 +172,13 @@
             <p14:sldId id="275"/>
           </p14:sldIdLst>
         </p14:section>
-        <p14:section name="References" id="{3e3709ad-460c-4f6d-399a-3068f8f6e998}">
+        <p14:section name="References" id="{41762e36-1634-1625-5a15-c6c513d52359}">
           <p14:sldIdLst>
             <p14:sldId id="276"/>
             <p14:sldId id="277"/>
           </p14:sldIdLst>
         </p14:section>
-        <p14:section name="Backup" id="{8e6cb49f-472c-5113-7f11-5194de302f3b}">
+        <p14:section name="Backup" id="{2386be17-cb86-e439-8e3f-82937b3015af}">
           <p14:sldIdLst>
             <p14:sldId id="278"/>
             <p14:sldId id="279"/>
